--- a/library/seminars/sem-06/rendered/smoke/sem-06-smoke.pptx
+++ b/library/seminars/sem-06/rendered/smoke/sem-06-smoke.pptx
@@ -4827,11 +4827,11 @@
             </a:avLst>
           </a:prstGeom>
           <a:solidFill>
-            <a:srgbClr val="161C30"/>
+            <a:srgbClr val="FFFFFF"/>
           </a:solidFill>
-          <a:ln w="15240">
+          <a:ln w="12700">
             <a:solidFill>
-              <a:srgbClr val="1C7293"/>
+              <a:srgbClr val="E5EAF0"/>
             </a:solidFill>
           </a:ln>
           <a:effectLst/>
@@ -4860,7 +4860,51 @@
       </p:sp>
       <p:sp>
         <p:nvSpPr>
-          <p:cNvPr id="4" name="TextBox 3"/>
+          <p:cNvPr id="4" name="Rectangle 3"/>
+          <p:cNvSpPr/>
+          <p:nvPr/>
+        </p:nvSpPr>
+        <p:spPr>
+          <a:xfrm>
+            <a:off x="502920" y="2198624"/>
+            <a:ext cx="50292" cy="2264410"/>
+          </a:xfrm>
+          <a:prstGeom prst="rect">
+            <a:avLst/>
+          </a:prstGeom>
+          <a:solidFill>
+            <a:srgbClr val="028090"/>
+          </a:solidFill>
+          <a:ln>
+            <a:noFill/>
+          </a:ln>
+          <a:effectLst/>
+        </p:spPr>
+        <p:style>
+          <a:lnRef idx="1">
+            <a:schemeClr val="accent1"/>
+          </a:lnRef>
+          <a:fillRef idx="3">
+            <a:schemeClr val="accent1"/>
+          </a:fillRef>
+          <a:effectRef idx="2">
+            <a:schemeClr val="accent1"/>
+          </a:effectRef>
+          <a:fontRef idx="minor">
+            <a:schemeClr val="lt1"/>
+          </a:fontRef>
+        </p:style>
+        <p:txBody>
+          <a:bodyPr rtlCol="0" anchor="ctr"/>
+          <a:lstStyle/>
+          <a:p>
+            <a:pPr algn="ctr"/>
+          </a:p>
+        </p:txBody>
+      </p:sp>
+      <p:sp>
+        <p:nvSpPr>
+          <p:cNvPr id="5" name="TextBox 4"/>
           <p:cNvSpPr txBox="1"/>
           <p:nvPr/>
         </p:nvSpPr>
@@ -4891,7 +4935,7 @@
             <a:r>
               <a:rPr sz="1150" b="0" i="0">
                 <a:solidFill>
-                  <a:srgbClr val="E3E9F2"/>
+                  <a:srgbClr val="141B2E"/>
                 </a:solidFill>
                 <a:latin typeface="Consolas"/>
               </a:rPr>
@@ -4910,7 +4954,7 @@
             <a:r>
               <a:rPr sz="1150" b="0" i="0">
                 <a:solidFill>
-                  <a:srgbClr val="E3E9F2"/>
+                  <a:srgbClr val="141B2E"/>
                 </a:solidFill>
                 <a:latin typeface="Consolas"/>
               </a:rPr>
@@ -4919,7 +4963,7 @@
             <a:r>
               <a:rPr sz="1150" b="1" i="0">
                 <a:solidFill>
-                  <a:srgbClr val="E3E9F2"/>
+                  <a:srgbClr val="141B2E"/>
                 </a:solidFill>
                 <a:latin typeface="Consolas"/>
               </a:rPr>
@@ -4928,7 +4972,7 @@
             <a:r>
               <a:rPr sz="1150" b="0" i="0">
                 <a:solidFill>
-                  <a:srgbClr val="E3E9F2"/>
+                  <a:srgbClr val="141B2E"/>
                 </a:solidFill>
                 <a:latin typeface="Consolas"/>
               </a:rPr>
@@ -4937,7 +4981,7 @@
             <a:r>
               <a:rPr sz="1150" b="1" i="0">
                 <a:solidFill>
-                  <a:srgbClr val="E3E9F2"/>
+                  <a:srgbClr val="141B2E"/>
                 </a:solidFill>
                 <a:latin typeface="Consolas"/>
               </a:rPr>
@@ -4956,7 +5000,7 @@
             <a:r>
               <a:rPr sz="1150" b="0" i="0">
                 <a:solidFill>
-                  <a:srgbClr val="E3E9F2"/>
+                  <a:srgbClr val="141B2E"/>
                 </a:solidFill>
                 <a:latin typeface="Consolas"/>
               </a:rPr>
@@ -4975,7 +5019,7 @@
             <a:r>
               <a:rPr sz="1150" b="0" i="0">
                 <a:solidFill>
-                  <a:srgbClr val="E3E9F2"/>
+                  <a:srgbClr val="141B2E"/>
                 </a:solidFill>
                 <a:latin typeface="Consolas"/>
               </a:rPr>
@@ -4994,7 +5038,7 @@
             <a:r>
               <a:rPr sz="1150" b="0" i="0">
                 <a:solidFill>
-                  <a:srgbClr val="E3E9F2"/>
+                  <a:srgbClr val="141B2E"/>
                 </a:solidFill>
                 <a:latin typeface="Consolas"/>
               </a:rPr>
@@ -5013,7 +5057,7 @@
             <a:r>
               <a:rPr sz="1150" b="0" i="0">
                 <a:solidFill>
-                  <a:srgbClr val="E3E9F2"/>
+                  <a:srgbClr val="141B2E"/>
                 </a:solidFill>
                 <a:latin typeface="Consolas"/>
               </a:rPr>
@@ -5032,7 +5076,7 @@
             <a:r>
               <a:rPr sz="1150" b="0" i="0">
                 <a:solidFill>
-                  <a:srgbClr val="E3E9F2"/>
+                  <a:srgbClr val="141B2E"/>
                 </a:solidFill>
                 <a:latin typeface="Consolas"/>
               </a:rPr>
@@ -5051,7 +5095,7 @@
             <a:r>
               <a:rPr sz="1150" b="0" i="0">
                 <a:solidFill>
-                  <a:srgbClr val="E3E9F2"/>
+                  <a:srgbClr val="141B2E"/>
                 </a:solidFill>
                 <a:latin typeface="Consolas"/>
               </a:rPr>
@@ -5070,7 +5114,7 @@
             <a:r>
               <a:rPr sz="1150" b="0" i="0">
                 <a:solidFill>
-                  <a:srgbClr val="E3E9F2"/>
+                  <a:srgbClr val="141B2E"/>
                 </a:solidFill>
                 <a:latin typeface="Consolas"/>
               </a:rPr>
@@ -5089,7 +5133,7 @@
             <a:r>
               <a:rPr sz="1150" b="0" i="0">
                 <a:solidFill>
-                  <a:srgbClr val="E3E9F2"/>
+                  <a:srgbClr val="141B2E"/>
                 </a:solidFill>
                 <a:latin typeface="Consolas"/>
               </a:rPr>
